--- a/Graph_Construction_and_Bellman_Ford_Visualization-spg.pptx
+++ b/Graph_Construction_and_Bellman_Ford_Visualization-spg.pptx
@@ -339,7 +339,7 @@
           <a:p>
             <a:fld id="{5BCAD085-E8A6-8845-BD4E-CB4CCA059FC4}" type="datetimeFigureOut">
               <a:rPr lang="en-US" smtClean="0"/>
-              <a:t>4/24/25</a:t>
+              <a:t>11/17/25</a:t>
             </a:fld>
             <a:endParaRPr lang="en-US"/>
           </a:p>
@@ -507,7 +507,7 @@
           <a:p>
             <a:fld id="{5BCAD085-E8A6-8845-BD4E-CB4CCA059FC4}" type="datetimeFigureOut">
               <a:rPr lang="en-US" smtClean="0"/>
-              <a:t>4/24/25</a:t>
+              <a:t>11/17/25</a:t>
             </a:fld>
             <a:endParaRPr lang="en-US"/>
           </a:p>
@@ -685,7 +685,7 @@
           <a:p>
             <a:fld id="{5BCAD085-E8A6-8845-BD4E-CB4CCA059FC4}" type="datetimeFigureOut">
               <a:rPr lang="en-US" smtClean="0"/>
-              <a:t>4/24/25</a:t>
+              <a:t>11/17/25</a:t>
             </a:fld>
             <a:endParaRPr lang="en-US"/>
           </a:p>
@@ -853,7 +853,7 @@
           <a:p>
             <a:fld id="{5BCAD085-E8A6-8845-BD4E-CB4CCA059FC4}" type="datetimeFigureOut">
               <a:rPr lang="en-US" smtClean="0"/>
-              <a:t>4/24/25</a:t>
+              <a:t>11/17/25</a:t>
             </a:fld>
             <a:endParaRPr lang="en-US"/>
           </a:p>
@@ -1098,7 +1098,7 @@
           <a:p>
             <a:fld id="{5BCAD085-E8A6-8845-BD4E-CB4CCA059FC4}" type="datetimeFigureOut">
               <a:rPr lang="en-US" smtClean="0"/>
-              <a:t>4/24/25</a:t>
+              <a:t>11/17/25</a:t>
             </a:fld>
             <a:endParaRPr lang="en-US"/>
           </a:p>
@@ -1383,7 +1383,7 @@
           <a:p>
             <a:fld id="{5BCAD085-E8A6-8845-BD4E-CB4CCA059FC4}" type="datetimeFigureOut">
               <a:rPr lang="en-US" smtClean="0"/>
-              <a:t>4/24/25</a:t>
+              <a:t>11/17/25</a:t>
             </a:fld>
             <a:endParaRPr lang="en-US"/>
           </a:p>
@@ -1802,7 +1802,7 @@
           <a:p>
             <a:fld id="{5BCAD085-E8A6-8845-BD4E-CB4CCA059FC4}" type="datetimeFigureOut">
               <a:rPr lang="en-US" smtClean="0"/>
-              <a:t>4/24/25</a:t>
+              <a:t>11/17/25</a:t>
             </a:fld>
             <a:endParaRPr lang="en-US"/>
           </a:p>
@@ -1919,7 +1919,7 @@
           <a:p>
             <a:fld id="{5BCAD085-E8A6-8845-BD4E-CB4CCA059FC4}" type="datetimeFigureOut">
               <a:rPr lang="en-US" smtClean="0"/>
-              <a:t>4/24/25</a:t>
+              <a:t>11/17/25</a:t>
             </a:fld>
             <a:endParaRPr lang="en-US"/>
           </a:p>
@@ -2014,7 +2014,7 @@
           <a:p>
             <a:fld id="{5BCAD085-E8A6-8845-BD4E-CB4CCA059FC4}" type="datetimeFigureOut">
               <a:rPr lang="en-US" smtClean="0"/>
-              <a:t>4/24/25</a:t>
+              <a:t>11/17/25</a:t>
             </a:fld>
             <a:endParaRPr lang="en-US"/>
           </a:p>
@@ -2289,7 +2289,7 @@
           <a:p>
             <a:fld id="{5BCAD085-E8A6-8845-BD4E-CB4CCA059FC4}" type="datetimeFigureOut">
               <a:rPr lang="en-US" smtClean="0"/>
-              <a:t>4/24/25</a:t>
+              <a:t>11/17/25</a:t>
             </a:fld>
             <a:endParaRPr lang="en-US"/>
           </a:p>
@@ -2541,7 +2541,7 @@
           <a:p>
             <a:fld id="{5BCAD085-E8A6-8845-BD4E-CB4CCA059FC4}" type="datetimeFigureOut">
               <a:rPr lang="en-US" smtClean="0"/>
-              <a:t>4/24/25</a:t>
+              <a:t>11/17/25</a:t>
             </a:fld>
             <a:endParaRPr lang="en-US"/>
           </a:p>
@@ -2752,7 +2752,7 @@
           <a:p>
             <a:fld id="{5BCAD085-E8A6-8845-BD4E-CB4CCA059FC4}" type="datetimeFigureOut">
               <a:rPr lang="en-US" smtClean="0"/>
-              <a:t>4/24/25</a:t>
+              <a:t>11/17/25</a:t>
             </a:fld>
             <a:endParaRPr lang="en-US"/>
           </a:p>
